--- a/3.4 Hoofdstuk 4 - Internationale markten/3.4.2 Paragraaf 2 - Inter-industriele handel/2. Leren/3.4.2 Inter-industriele handel – presentatie.pptx
+++ b/3.4 Hoofdstuk 4 - Internationale markten/3.4.2 Paragraaf 2 - Inter-industriele handel/2. Leren/3.4.2 Inter-industriele handel – presentatie.pptx
@@ -2182,6 +2182,10 @@
             </a:outerShdw>
           </a:effectLst>
         </p:spPr>
+        <p:txBody>
+          <a:bodyPr/>
+          <a:p/>
+        </p:txBody>
       </p:sp>
       <p:sp>
         <p:nvSpPr>
@@ -2202,6 +2206,10 @@
           </a:solidFill>
           <a:ln/>
         </p:spPr>
+        <p:txBody>
+          <a:bodyPr/>
+          <a:p/>
+        </p:txBody>
       </p:sp>
       <p:sp>
         <p:nvSpPr>
@@ -2385,6 +2393,10 @@
             </a:outerShdw>
           </a:effectLst>
         </p:spPr>
+        <p:txBody>
+          <a:bodyPr/>
+          <a:p/>
+        </p:txBody>
       </p:sp>
       <p:sp>
         <p:nvSpPr>
@@ -2405,6 +2417,10 @@
           </a:solidFill>
           <a:ln/>
         </p:spPr>
+        <p:txBody>
+          <a:bodyPr/>
+          <a:p/>
+        </p:txBody>
       </p:sp>
       <p:sp>
         <p:nvSpPr>
@@ -2705,6 +2721,10 @@
             </a:outerShdw>
           </a:effectLst>
         </p:spPr>
+        <p:txBody>
+          <a:bodyPr/>
+          <a:p/>
+        </p:txBody>
       </p:sp>
       <p:sp>
         <p:nvSpPr>
@@ -2725,6 +2745,10 @@
           </a:solidFill>
           <a:ln/>
         </p:spPr>
+        <p:txBody>
+          <a:bodyPr/>
+          <a:p/>
+        </p:txBody>
       </p:sp>
       <p:sp>
         <p:nvSpPr>
@@ -2832,6 +2856,10 @@
             </a:outerShdw>
           </a:effectLst>
         </p:spPr>
+        <p:txBody>
+          <a:bodyPr/>
+          <a:p/>
+        </p:txBody>
       </p:sp>
       <p:sp>
         <p:nvSpPr>
@@ -2852,6 +2880,10 @@
           </a:solidFill>
           <a:ln/>
         </p:spPr>
+        <p:txBody>
+          <a:bodyPr/>
+          <a:p/>
+        </p:txBody>
       </p:sp>
       <p:sp>
         <p:nvSpPr>
@@ -2959,6 +2991,10 @@
             </a:outerShdw>
           </a:effectLst>
         </p:spPr>
+        <p:txBody>
+          <a:bodyPr/>
+          <a:p/>
+        </p:txBody>
       </p:sp>
       <p:sp>
         <p:nvSpPr>
@@ -2979,6 +3015,10 @@
           </a:solidFill>
           <a:ln/>
         </p:spPr>
+        <p:txBody>
+          <a:bodyPr/>
+          <a:p/>
+        </p:txBody>
       </p:sp>
       <p:sp>
         <p:nvSpPr>
@@ -3203,6 +3243,8 @@
               </a:rPr>
               <a:t>Inter-industriële handel = ruil van verschillende producten</a:t>
             </a:r>
+          </a:p>
+          <a:p>
             <a:pPr algn="l" marL="342900" indent="-342900">
               <a:lnSpc>
                 <a:spcPct val="160000"/>
@@ -3224,6 +3266,8 @@
               </a:rPr>
               <a:t>Comparatief voordeel = laagste opofferingskosten</a:t>
             </a:r>
+          </a:p>
+          <a:p>
             <a:pPr algn="l" marL="342900" indent="-342900">
               <a:lnSpc>
                 <a:spcPct val="160000"/>
@@ -3245,6 +3289,8 @@
               </a:rPr>
               <a:t>Ruilverhouding tussen beide opofferingskosten</a:t>
             </a:r>
+          </a:p>
+          <a:p>
             <a:pPr algn="l" marL="342900" indent="-342900">
               <a:lnSpc>
                 <a:spcPct val="160000"/>
@@ -3266,6 +3312,8 @@
               </a:rPr>
               <a:t>Specialisatie leidt tot arbeidsbesparing</a:t>
             </a:r>
+          </a:p>
+          <a:p>
             <a:pPr algn="l" marL="342900" indent="-342900">
               <a:lnSpc>
                 <a:spcPct val="160000"/>
@@ -3287,7 +3335,6 @@
               </a:rPr>
               <a:t>Strategische overwegingen beperken specialisatie</a:t>
             </a:r>
-            <a:endParaRPr lang="en-US" sz="1500" dirty="0"/>
           </a:p>
         </p:txBody>
       </p:sp>
@@ -3374,6 +3421,10 @@
           </a:solidFill>
           <a:ln/>
         </p:spPr>
+        <p:txBody>
+          <a:bodyPr/>
+          <a:p/>
+        </p:txBody>
       </p:sp>
       <p:sp>
         <p:nvSpPr>
@@ -3472,6 +3523,10 @@
           </a:solidFill>
           <a:ln/>
         </p:spPr>
+        <p:txBody>
+          <a:bodyPr/>
+          <a:p/>
+        </p:txBody>
       </p:sp>
       <p:sp>
         <p:nvSpPr>
@@ -3570,6 +3625,10 @@
           </a:solidFill>
           <a:ln/>
         </p:spPr>
+        <p:txBody>
+          <a:bodyPr/>
+          <a:p/>
+        </p:txBody>
       </p:sp>
       <p:sp>
         <p:nvSpPr>
@@ -3668,6 +3727,10 @@
           </a:solidFill>
           <a:ln/>
         </p:spPr>
+        <p:txBody>
+          <a:bodyPr/>
+          <a:p/>
+        </p:txBody>
       </p:sp>
       <p:sp>
         <p:nvSpPr>
@@ -3766,6 +3829,10 @@
           </a:solidFill>
           <a:ln/>
         </p:spPr>
+        <p:txBody>
+          <a:bodyPr/>
+          <a:p/>
+        </p:txBody>
       </p:sp>
       <p:sp>
         <p:nvSpPr>
@@ -3864,6 +3931,10 @@
           </a:solidFill>
           <a:ln/>
         </p:spPr>
+        <p:txBody>
+          <a:bodyPr/>
+          <a:p/>
+        </p:txBody>
       </p:sp>
       <p:sp>
         <p:nvSpPr>
@@ -4035,6 +4106,10 @@
             </a:outerShdw>
           </a:effectLst>
         </p:spPr>
+        <p:txBody>
+          <a:bodyPr/>
+          <a:p/>
+        </p:txBody>
       </p:sp>
       <p:sp>
         <p:nvSpPr>
@@ -4055,6 +4130,10 @@
           </a:solidFill>
           <a:ln/>
         </p:spPr>
+        <p:txBody>
+          <a:bodyPr/>
+          <a:p/>
+        </p:txBody>
       </p:sp>
       <p:sp>
         <p:nvSpPr>
@@ -4314,6 +4393,10 @@
             </a:outerShdw>
           </a:effectLst>
         </p:spPr>
+        <p:txBody>
+          <a:bodyPr/>
+          <a:p/>
+        </p:txBody>
       </p:sp>
       <p:sp>
         <p:nvSpPr>
@@ -4334,6 +4417,10 @@
           </a:solidFill>
           <a:ln/>
         </p:spPr>
+        <p:txBody>
+          <a:bodyPr/>
+          <a:p/>
+        </p:txBody>
       </p:sp>
       <p:sp>
         <p:nvSpPr>
@@ -4557,6 +4644,10 @@
             </a:outerShdw>
           </a:effectLst>
         </p:spPr>
+        <p:txBody>
+          <a:bodyPr/>
+          <a:p/>
+        </p:txBody>
       </p:sp>
       <p:sp>
         <p:nvSpPr>
@@ -4577,6 +4668,10 @@
           </a:solidFill>
           <a:ln/>
         </p:spPr>
+        <p:txBody>
+          <a:bodyPr/>
+          <a:p/>
+        </p:txBody>
       </p:sp>
       <p:sp>
         <p:nvSpPr>
@@ -4645,6 +4740,10 @@
             </a:outerShdw>
           </a:effectLst>
         </p:spPr>
+        <p:txBody>
+          <a:bodyPr/>
+          <a:p/>
+        </p:txBody>
       </p:sp>
       <p:sp>
         <p:nvSpPr>
@@ -4665,6 +4764,10 @@
           </a:solidFill>
           <a:ln/>
         </p:spPr>
+        <p:txBody>
+          <a:bodyPr/>
+          <a:p/>
+        </p:txBody>
       </p:sp>
       <p:sp>
         <p:nvSpPr>
@@ -4838,6 +4941,10 @@
             </a:outerShdw>
           </a:effectLst>
         </p:spPr>
+        <p:txBody>
+          <a:bodyPr/>
+          <a:p/>
+        </p:txBody>
       </p:sp>
       <p:sp>
         <p:nvSpPr>
@@ -4858,6 +4965,10 @@
           </a:solidFill>
           <a:ln/>
         </p:spPr>
+        <p:txBody>
+          <a:bodyPr/>
+          <a:p/>
+        </p:txBody>
       </p:sp>
       <p:sp>
         <p:nvSpPr>
@@ -5139,6 +5250,10 @@
             </a:outerShdw>
           </a:effectLst>
         </p:spPr>
+        <p:txBody>
+          <a:bodyPr/>
+          <a:p/>
+        </p:txBody>
       </p:sp>
       <p:sp>
         <p:nvSpPr>
@@ -5251,6 +5366,10 @@
             </a:outerShdw>
           </a:effectLst>
         </p:spPr>
+        <p:txBody>
+          <a:bodyPr/>
+          <a:p/>
+        </p:txBody>
       </p:sp>
       <p:sp>
         <p:nvSpPr>
@@ -5363,6 +5482,10 @@
             </a:outerShdw>
           </a:effectLst>
         </p:spPr>
+        <p:txBody>
+          <a:bodyPr/>
+          <a:p/>
+        </p:txBody>
       </p:sp>
       <p:sp>
         <p:nvSpPr>
@@ -5475,6 +5598,10 @@
             </a:outerShdw>
           </a:effectLst>
         </p:spPr>
+        <p:txBody>
+          <a:bodyPr/>
+          <a:p/>
+        </p:txBody>
       </p:sp>
       <p:sp>
         <p:nvSpPr>
@@ -5541,6 +5668,10 @@
             <a:prstDash val="solid"/>
           </a:ln>
         </p:spPr>
+        <p:txBody>
+          <a:bodyPr/>
+          <a:p/>
+        </p:txBody>
       </p:sp>
       <p:sp>
         <p:nvSpPr>
@@ -5561,6 +5692,10 @@
           </a:solidFill>
           <a:ln/>
         </p:spPr>
+        <p:txBody>
+          <a:bodyPr/>
+          <a:p/>
+        </p:txBody>
       </p:sp>
       <p:sp>
         <p:nvSpPr>
@@ -6688,6 +6823,10 @@
             </a:outerShdw>
           </a:effectLst>
         </p:spPr>
+        <p:txBody>
+          <a:bodyPr/>
+          <a:p/>
+        </p:txBody>
       </p:sp>
       <p:sp>
         <p:nvSpPr>
@@ -6708,6 +6847,10 @@
           </a:solidFill>
           <a:ln/>
         </p:spPr>
+        <p:txBody>
+          <a:bodyPr/>
+          <a:p/>
+        </p:txBody>
       </p:sp>
       <p:sp>
         <p:nvSpPr>
@@ -6912,6 +7055,10 @@
             </a:outerShdw>
           </a:effectLst>
         </p:spPr>
+        <p:txBody>
+          <a:bodyPr/>
+          <a:p/>
+        </p:txBody>
       </p:sp>
       <p:sp>
         <p:nvSpPr>
@@ -7024,6 +7171,10 @@
             </a:outerShdw>
           </a:effectLst>
         </p:spPr>
+        <p:txBody>
+          <a:bodyPr/>
+          <a:p/>
+        </p:txBody>
       </p:sp>
       <p:sp>
         <p:nvSpPr>
@@ -7136,6 +7287,10 @@
             </a:outerShdw>
           </a:effectLst>
         </p:spPr>
+        <p:txBody>
+          <a:bodyPr/>
+          <a:p/>
+        </p:txBody>
       </p:sp>
       <p:sp>
         <p:nvSpPr>
@@ -7248,6 +7403,10 @@
             </a:outerShdw>
           </a:effectLst>
         </p:spPr>
+        <p:txBody>
+          <a:bodyPr/>
+          <a:p/>
+        </p:txBody>
       </p:sp>
       <p:sp>
         <p:nvSpPr>
@@ -7316,6 +7475,10 @@
             </a:outerShdw>
           </a:effectLst>
         </p:spPr>
+        <p:txBody>
+          <a:bodyPr/>
+          <a:p/>
+        </p:txBody>
       </p:sp>
       <p:sp>
         <p:nvSpPr>
@@ -7336,6 +7499,10 @@
           </a:solidFill>
           <a:ln/>
         </p:spPr>
+        <p:txBody>
+          <a:bodyPr/>
+          <a:p/>
+        </p:txBody>
       </p:sp>
       <p:sp>
         <p:nvSpPr>
@@ -7544,6 +7711,10 @@
             </a:outerShdw>
           </a:effectLst>
         </p:spPr>
+        <p:txBody>
+          <a:bodyPr/>
+          <a:p/>
+        </p:txBody>
       </p:sp>
       <p:sp>
         <p:nvSpPr>
@@ -7564,6 +7735,10 @@
           </a:solidFill>
           <a:ln/>
         </p:spPr>
+        <p:txBody>
+          <a:bodyPr/>
+          <a:p/>
+        </p:txBody>
       </p:sp>
       <p:sp>
         <p:nvSpPr>
@@ -7625,6 +7800,10 @@
           </a:solidFill>
           <a:ln/>
         </p:spPr>
+        <p:txBody>
+          <a:bodyPr/>
+          <a:p/>
+        </p:txBody>
       </p:sp>
       <p:sp>
         <p:nvSpPr>
@@ -7652,6 +7831,10 @@
             <a:prstDash val="solid"/>
           </a:ln>
         </p:spPr>
+        <p:txBody>
+          <a:bodyPr/>
+          <a:p/>
+        </p:txBody>
       </p:sp>
       <p:sp>
         <p:nvSpPr>
@@ -7940,6 +8123,10 @@
             </a:outerShdw>
           </a:effectLst>
         </p:spPr>
+        <p:txBody>
+          <a:bodyPr/>
+          <a:p/>
+        </p:txBody>
       </p:sp>
       <p:sp>
         <p:nvSpPr>
@@ -8052,6 +8239,10 @@
             </a:outerShdw>
           </a:effectLst>
         </p:spPr>
+        <p:txBody>
+          <a:bodyPr/>
+          <a:p/>
+        </p:txBody>
       </p:sp>
       <p:sp>
         <p:nvSpPr>
@@ -8164,6 +8355,10 @@
             </a:outerShdw>
           </a:effectLst>
         </p:spPr>
+        <p:txBody>
+          <a:bodyPr/>
+          <a:p/>
+        </p:txBody>
       </p:sp>
       <p:sp>
         <p:nvSpPr>
@@ -8276,6 +8471,10 @@
             </a:outerShdw>
           </a:effectLst>
         </p:spPr>
+        <p:txBody>
+          <a:bodyPr/>
+          <a:p/>
+        </p:txBody>
       </p:sp>
       <p:sp>
         <p:nvSpPr>
@@ -8388,6 +8587,10 @@
             </a:outerShdw>
           </a:effectLst>
         </p:spPr>
+        <p:txBody>
+          <a:bodyPr/>
+          <a:p/>
+        </p:txBody>
       </p:sp>
       <p:sp>
         <p:nvSpPr>
